--- a/slides/slide_08.pptx
+++ b/slides/slide_08.pptx
@@ -26,61 +26,38 @@
       <p:bold r:id="rId9"/>
     </p:embeddedFont>
     <p:embeddedFont>
-      <p:font typeface="Bebas Neue" panose="020B0606020202050201" pitchFamily="2" charset="0"/>
+      <p:font typeface="Hanken Grotesk" panose="020B0604020202020204" charset="0"/>
       <p:regular r:id="rId10"/>
-    </p:embeddedFont>
-    <p:embeddedFont>
-      <p:font typeface="DM Mono" panose="020B0509040201040103" pitchFamily="1" charset="0"/>
-      <p:regular r:id="rId11"/>
+      <p:bold r:id="rId11"/>
       <p:italic r:id="rId12"/>
-    </p:embeddedFont>
-    <p:embeddedFont>
-      <p:font typeface="Hanken Grotesk" panose="020B0604020202020204" charset="0"/>
-      <p:regular r:id="rId13"/>
-      <p:bold r:id="rId14"/>
-      <p:italic r:id="rId15"/>
-      <p:boldItalic r:id="rId16"/>
-    </p:embeddedFont>
-    <p:embeddedFont>
-      <p:font typeface="Open Sans" panose="020B0606030504020204" pitchFamily="2" charset="0"/>
-      <p:regular r:id="rId17"/>
-      <p:bold r:id="rId18"/>
-      <p:italic r:id="rId19"/>
-      <p:boldItalic r:id="rId20"/>
+      <p:boldItalic r:id="rId13"/>
     </p:embeddedFont>
     <p:embeddedFont>
       <p:font typeface="Raleway" pitchFamily="2" charset="0"/>
-      <p:regular r:id="rId21"/>
-      <p:bold r:id="rId22"/>
-      <p:italic r:id="rId23"/>
-      <p:boldItalic r:id="rId24"/>
+      <p:regular r:id="rId14"/>
+      <p:bold r:id="rId15"/>
+      <p:italic r:id="rId16"/>
+      <p:boldItalic r:id="rId17"/>
     </p:embeddedFont>
     <p:embeddedFont>
       <p:font typeface="Raleway Black" pitchFamily="2" charset="0"/>
-      <p:bold r:id="rId25"/>
-      <p:boldItalic r:id="rId26"/>
+      <p:bold r:id="rId18"/>
+      <p:boldItalic r:id="rId19"/>
     </p:embeddedFont>
     <p:embeddedFont>
       <p:font typeface="Raleway ExtraBold" pitchFamily="2" charset="0"/>
-      <p:bold r:id="rId27"/>
-      <p:boldItalic r:id="rId28"/>
+      <p:bold r:id="rId20"/>
+      <p:boldItalic r:id="rId21"/>
     </p:embeddedFont>
     <p:embeddedFont>
       <p:font typeface="Roboto Medium" panose="02000000000000000000" pitchFamily="2" charset="0"/>
-      <p:regular r:id="rId29"/>
-      <p:italic r:id="rId30"/>
+      <p:regular r:id="rId22"/>
+      <p:italic r:id="rId23"/>
     </p:embeddedFont>
     <p:embeddedFont>
       <p:font typeface="Roboto" panose="02000000000000000000" pitchFamily="2"/>
-      <p:bold r:id="rId31"/>
-      <p:boldItalic r:id="rId32"/>
-    </p:embeddedFont>
-    <p:embeddedFont>
-      <p:font typeface="Segoe UI" panose="020B0502040204020203" pitchFamily="2" charset="0"/>
-      <p:regular r:id="rId33"/>
-      <p:bold r:id="rId34"/>
-      <p:italic r:id="rId35"/>
-      <p:boldItalic r:id="rId36"/>
+      <p:bold r:id="rId24"/>
+      <p:boldItalic r:id="rId25"/>
     </p:embeddedFont>
   </p:embeddedFontLst>
   <p:custDataLst>
@@ -884,7 +861,7 @@
           <a:bodyPr/>
           <a:lstStyle/>
           <a:p>
-            <a:fld id="{2645D9C5-9DDE-483D-B36A-9B634AC90F10}" type="datetimeFigureOut">
+            <a:fld id="{77152292-FB1B-4388-AF80-C193F981E9AD}" type="datetimeFigureOut">
               <a:rPr lang="en-US" smtClean="0"/>
               <a:t>11/7/2009</a:t>
             </a:fld>
@@ -1048,7 +1025,7 @@
           <a:bodyPr/>
           <a:lstStyle/>
           <a:p>
-            <a:fld id="{973A65DC-DD11-4841-AE0C-D56564E3F3E2}" type="datetimeFigureOut">
+            <a:fld id="{1C5450C3-88B2-44DE-A819-BCCF25E078CE}" type="datetimeFigureOut">
               <a:rPr lang="en-US" smtClean="0"/>
               <a:t>11/7/2009</a:t>
             </a:fld>
@@ -1212,7 +1189,7 @@
           <a:bodyPr/>
           <a:lstStyle/>
           <a:p>
-            <a:fld id="{40E12DD7-CE94-4C8C-AB16-107824A59E96}" type="datetimeFigureOut">
+            <a:fld id="{60D4AAB0-1E73-4F7A-BFC6-801D1E8C1C48}" type="datetimeFigureOut">
               <a:rPr lang="en-US" smtClean="0"/>
               <a:t>11/7/2009</a:t>
             </a:fld>
@@ -13117,7 +13094,7 @@
           <a:bodyPr/>
           <a:lstStyle/>
           <a:p>
-            <a:fld id="{F4A18398-0792-4E6C-B648-BE42047A0724}" type="datetimeFigureOut">
+            <a:fld id="{0A77948C-9B5B-4DDC-AE10-30371CEA775A}" type="datetimeFigureOut">
               <a:rPr lang="en-US" smtClean="0"/>
               <a:t>11/7/2009</a:t>
             </a:fld>
@@ -33218,7 +33195,7 @@
           <a:bodyPr/>
           <a:lstStyle/>
           <a:p>
-            <a:fld id="{501E7177-172E-4D49-B17F-B2B949B6BF36}" type="datetimeFigureOut">
+            <a:fld id="{160E8813-FF1A-4DB8-AA23-896CBBB7066A}" type="datetimeFigureOut">
               <a:rPr lang="en-US" smtClean="0"/>
               <a:t>11/7/2009</a:t>
             </a:fld>
@@ -38865,7 +38842,7 @@
           <a:bodyPr/>
           <a:lstStyle/>
           <a:p>
-            <a:fld id="{3635B1D8-F6E3-4CF1-A0D4-A51972F5F061}" type="datetimeFigureOut">
+            <a:fld id="{79C132C8-EEE9-403B-AA13-71BEA5B11A9F}" type="datetimeFigureOut">
               <a:rPr lang="en-US" smtClean="0"/>
               <a:t>11/7/2009</a:t>
             </a:fld>
@@ -39254,7 +39231,7 @@
           <a:bodyPr/>
           <a:lstStyle/>
           <a:p>
-            <a:fld id="{14D46552-6282-413D-A2B4-4D01C7584859}" type="datetimeFigureOut">
+            <a:fld id="{A6EBA84C-5A56-46F6-AE84-20A2697A0A0D}" type="datetimeFigureOut">
               <a:rPr lang="en-US" smtClean="0"/>
               <a:t>11/7/2009</a:t>
             </a:fld>
@@ -39367,7 +39344,7 @@
           <a:bodyPr/>
           <a:lstStyle/>
           <a:p>
-            <a:fld id="{B0E909C0-0BDF-4CFD-97D3-9339C98C6869}" type="datetimeFigureOut">
+            <a:fld id="{10BAAB29-7ACA-4E4F-8390-5AF67F3E78BF}" type="datetimeFigureOut">
               <a:rPr lang="en-US" smtClean="0"/>
               <a:t>11/7/2009</a:t>
             </a:fld>
@@ -39457,7 +39434,7 @@
           <a:bodyPr/>
           <a:lstStyle/>
           <a:p>
-            <a:fld id="{7C4335B1-7D16-4A9B-8F40-BAC0FB417F38}" type="datetimeFigureOut">
+            <a:fld id="{B3A98A9A-7AC9-43B6-952C-0306C6046E1C}" type="datetimeFigureOut">
               <a:rPr lang="en-US" smtClean="0"/>
               <a:t>11/7/2009</a:t>
             </a:fld>
@@ -39712,7 +39689,7 @@
           <a:bodyPr/>
           <a:lstStyle/>
           <a:p>
-            <a:fld id="{B8F5F7BA-DFF0-4DEB-99A3-153CB0BD7E18}" type="datetimeFigureOut">
+            <a:fld id="{82DE7081-E454-4474-8DFE-F50223A1CE0F}" type="datetimeFigureOut">
               <a:rPr lang="en-US" smtClean="0"/>
               <a:t>11/7/2009</a:t>
             </a:fld>
@@ -39944,7 +39921,7 @@
           <a:bodyPr/>
           <a:lstStyle/>
           <a:p>
-            <a:fld id="{FB31599F-B78C-4993-AB41-D71FB5E25C34}" type="datetimeFigureOut">
+            <a:fld id="{113202CD-C64A-47F1-8815-74AE70E6F870}" type="datetimeFigureOut">
               <a:rPr lang="en-US" smtClean="0"/>
               <a:t>11/7/2009</a:t>
             </a:fld>
@@ -41813,10 +41790,16 @@
               <a:buNone/>
             </a:pPr>
             <a:r>
-              <a:rPr lang="en"/>
+              <a:rPr lang="en" b="1">
+                <a:latin typeface="Arial"/>
+                <a:cs typeface="Arial"/>
+              </a:rPr>
               <a:t>4,498,300,000</a:t>
             </a:r>
-            <a:endParaRPr/>
+            <a:endParaRPr lang="ru-RU" b="1">
+              <a:latin typeface="Arial"/>
+              <a:cs typeface="Arial"/>
+            </a:endParaRPr>
           </a:p>
         </p:txBody>
       </p:sp>
@@ -41847,10 +41830,16 @@
           <a:p>
             <a:pPr marL="0" indent="0"/>
             <a:r>
-              <a:rPr lang="en"/>
+              <a:rPr lang="en">
+                <a:latin typeface="Arial"/>
+                <a:cs typeface="Arial"/>
+              </a:rPr>
               <a:t>Количество пользователей, проанализированных в нашем маркетинговом исследовании</a:t>
             </a:r>
-            <a:endParaRPr lang="ru-RU" err="1"/>
+            <a:endParaRPr lang="ru-RU" err="1">
+              <a:latin typeface="Arial"/>
+              <a:cs typeface="Arial"/>
+            </a:endParaRPr>
           </a:p>
         </p:txBody>
       </p:sp>

--- a/slides/slide_08.pptx
+++ b/slides/slide_08.pptx
@@ -861,7 +861,7 @@
           <a:bodyPr/>
           <a:lstStyle/>
           <a:p>
-            <a:fld id="{77152292-FB1B-4388-AF80-C193F981E9AD}" type="datetimeFigureOut">
+            <a:fld id="{596F8108-37CD-48E1-A123-05C7468D221D}" type="datetimeFigureOut">
               <a:rPr lang="en-US" smtClean="0"/>
               <a:t>11/7/2009</a:t>
             </a:fld>
@@ -1025,7 +1025,7 @@
           <a:bodyPr/>
           <a:lstStyle/>
           <a:p>
-            <a:fld id="{1C5450C3-88B2-44DE-A819-BCCF25E078CE}" type="datetimeFigureOut">
+            <a:fld id="{C5F59971-F6C4-4AC7-B52A-6581ADE9F5FB}" type="datetimeFigureOut">
               <a:rPr lang="en-US" smtClean="0"/>
               <a:t>11/7/2009</a:t>
             </a:fld>
@@ -1189,7 +1189,7 @@
           <a:bodyPr/>
           <a:lstStyle/>
           <a:p>
-            <a:fld id="{60D4AAB0-1E73-4F7A-BFC6-801D1E8C1C48}" type="datetimeFigureOut">
+            <a:fld id="{CD270EF1-952C-42B1-9F96-874EBDAA24EE}" type="datetimeFigureOut">
               <a:rPr lang="en-US" smtClean="0"/>
               <a:t>11/7/2009</a:t>
             </a:fld>
@@ -13094,7 +13094,7 @@
           <a:bodyPr/>
           <a:lstStyle/>
           <a:p>
-            <a:fld id="{0A77948C-9B5B-4DDC-AE10-30371CEA775A}" type="datetimeFigureOut">
+            <a:fld id="{CD03A070-CAE5-418F-BD28-15D162656EA5}" type="datetimeFigureOut">
               <a:rPr lang="en-US" smtClean="0"/>
               <a:t>11/7/2009</a:t>
             </a:fld>
@@ -33195,7 +33195,7 @@
           <a:bodyPr/>
           <a:lstStyle/>
           <a:p>
-            <a:fld id="{160E8813-FF1A-4DB8-AA23-896CBBB7066A}" type="datetimeFigureOut">
+            <a:fld id="{0B12A2DB-1EC8-4E11-ADF3-3D1FFCE86DCF}" type="datetimeFigureOut">
               <a:rPr lang="en-US" smtClean="0"/>
               <a:t>11/7/2009</a:t>
             </a:fld>
@@ -38842,7 +38842,7 @@
           <a:bodyPr/>
           <a:lstStyle/>
           <a:p>
-            <a:fld id="{79C132C8-EEE9-403B-AA13-71BEA5B11A9F}" type="datetimeFigureOut">
+            <a:fld id="{43EE2F34-B287-44CC-8DC3-9EF4BF4E534F}" type="datetimeFigureOut">
               <a:rPr lang="en-US" smtClean="0"/>
               <a:t>11/7/2009</a:t>
             </a:fld>
@@ -39231,7 +39231,7 @@
           <a:bodyPr/>
           <a:lstStyle/>
           <a:p>
-            <a:fld id="{A6EBA84C-5A56-46F6-AE84-20A2697A0A0D}" type="datetimeFigureOut">
+            <a:fld id="{C8AC8AB3-F105-41E2-B299-DAFD40CDDAE3}" type="datetimeFigureOut">
               <a:rPr lang="en-US" smtClean="0"/>
               <a:t>11/7/2009</a:t>
             </a:fld>
@@ -39344,7 +39344,7 @@
           <a:bodyPr/>
           <a:lstStyle/>
           <a:p>
-            <a:fld id="{10BAAB29-7ACA-4E4F-8390-5AF67F3E78BF}" type="datetimeFigureOut">
+            <a:fld id="{D3C9C245-6E3E-4932-89E3-1F5E96ED9BC1}" type="datetimeFigureOut">
               <a:rPr lang="en-US" smtClean="0"/>
               <a:t>11/7/2009</a:t>
             </a:fld>
@@ -39434,7 +39434,7 @@
           <a:bodyPr/>
           <a:lstStyle/>
           <a:p>
-            <a:fld id="{B3A98A9A-7AC9-43B6-952C-0306C6046E1C}" type="datetimeFigureOut">
+            <a:fld id="{5D331643-32E8-4A9F-80EA-C012C246BB0A}" type="datetimeFigureOut">
               <a:rPr lang="en-US" smtClean="0"/>
               <a:t>11/7/2009</a:t>
             </a:fld>
@@ -39689,7 +39689,7 @@
           <a:bodyPr/>
           <a:lstStyle/>
           <a:p>
-            <a:fld id="{82DE7081-E454-4474-8DFE-F50223A1CE0F}" type="datetimeFigureOut">
+            <a:fld id="{D4484190-62F9-4C32-A109-53D636FC497A}" type="datetimeFigureOut">
               <a:rPr lang="en-US" smtClean="0"/>
               <a:t>11/7/2009</a:t>
             </a:fld>
@@ -39921,7 +39921,7 @@
           <a:bodyPr/>
           <a:lstStyle/>
           <a:p>
-            <a:fld id="{113202CD-C64A-47F1-8815-74AE70E6F870}" type="datetimeFigureOut">
+            <a:fld id="{BB61D10B-F51F-4450-AE9A-C2FAAD72FEC3}" type="datetimeFigureOut">
               <a:rPr lang="en-US" smtClean="0"/>
               <a:t>11/7/2009</a:t>
             </a:fld>
